--- a/Employee Salary-Prediction-Using-Machine-Learning Final.pptx
+++ b/Employee Salary-Prediction-Using-Machine-Learning Final.pptx
@@ -159,60 +159,325 @@
 </p:presentation>
 </file>
 
+<file path=ppt/revisionInfo.xml><?xml version="1.0" encoding="utf-8"?>
+<p1510:revInfo xmlns:a="http://schemas.openxmlformats.org/drawingml/2006/main" xmlns:r="http://schemas.openxmlformats.org/officeDocument/2006/relationships" xmlns:p1510="http://schemas.microsoft.com/office/powerpoint/2015/10/main">
+  <p1510:revLst>
+    <p1510:client id="{32E0320E-F84D-4F2F-84D5-59E01E9CCC73}" v="9" dt="2025-04-20T17:56:04.194"/>
+  </p1510:revLst>
+</p1510:revInfo>
+</file>
+
 <file path=ppt/changesInfos/changesInfo1.xml><?xml version="1.0" encoding="utf-8"?>
 <pc:chgInfo xmlns:a="http://schemas.openxmlformats.org/drawingml/2006/main" xmlns:r="http://schemas.openxmlformats.org/officeDocument/2006/relationships" xmlns:ac="http://schemas.microsoft.com/office/drawing/2013/main/command" xmlns:pc="http://schemas.microsoft.com/office/powerpoint/2013/main/command">
   <pc:docChgLst>
-    <pc:chgData name="mathangi.ashok25@gmail.com" userId="9696bdb82b516cd5" providerId="LiveId" clId="{34DDD5AE-C822-4FE7-A036-1A26010DC373}"/>
-    <pc:docChg chg="modSld">
-      <pc:chgData name="mathangi.ashok25@gmail.com" userId="9696bdb82b516cd5" providerId="LiveId" clId="{34DDD5AE-C822-4FE7-A036-1A26010DC373}" dt="2025-04-22T17:54:29.157" v="27" actId="20577"/>
+    <pc:chgData name="mathangi.ashok25@gmail.com" userId="9696bdb82b516cd5" providerId="LiveId" clId="{32E0320E-F84D-4F2F-84D5-59E01E9CCC73}"/>
+    <pc:docChg chg="undo custSel addSld delSld modSld modSection">
+      <pc:chgData name="mathangi.ashok25@gmail.com" userId="9696bdb82b516cd5" providerId="LiveId" clId="{32E0320E-F84D-4F2F-84D5-59E01E9CCC73}" dt="2025-04-23T10:51:38.676" v="362" actId="20577"/>
       <pc:docMkLst>
         <pc:docMk/>
       </pc:docMkLst>
       <pc:sldChg chg="modSp mod">
-        <pc:chgData name="mathangi.ashok25@gmail.com" userId="9696bdb82b516cd5" providerId="LiveId" clId="{34DDD5AE-C822-4FE7-A036-1A26010DC373}" dt="2025-04-22T17:54:29.157" v="27" actId="20577"/>
+        <pc:chgData name="mathangi.ashok25@gmail.com" userId="9696bdb82b516cd5" providerId="LiveId" clId="{32E0320E-F84D-4F2F-84D5-59E01E9CCC73}" dt="2025-04-23T10:51:38.676" v="362" actId="20577"/>
         <pc:sldMkLst>
           <pc:docMk/>
           <pc:sldMk cId="0" sldId="256"/>
         </pc:sldMkLst>
         <pc:spChg chg="mod">
-          <ac:chgData name="mathangi.ashok25@gmail.com" userId="9696bdb82b516cd5" providerId="LiveId" clId="{34DDD5AE-C822-4FE7-A036-1A26010DC373}" dt="2025-04-21T11:04:59.862" v="3" actId="1076"/>
-          <ac:spMkLst>
-            <pc:docMk/>
-            <pc:sldMk cId="0" sldId="256"/>
-            <ac:spMk id="3" creationId="{00000000-0000-0000-0000-000000000000}"/>
-          </ac:spMkLst>
-        </pc:spChg>
-        <pc:spChg chg="mod">
-          <ac:chgData name="mathangi.ashok25@gmail.com" userId="9696bdb82b516cd5" providerId="LiveId" clId="{34DDD5AE-C822-4FE7-A036-1A26010DC373}" dt="2025-04-22T17:54:29.157" v="27" actId="20577"/>
+          <ac:chgData name="mathangi.ashok25@gmail.com" userId="9696bdb82b516cd5" providerId="LiveId" clId="{32E0320E-F84D-4F2F-84D5-59E01E9CCC73}" dt="2025-04-23T10:51:38.676" v="362" actId="20577"/>
           <ac:spMkLst>
             <pc:docMk/>
             <pc:sldMk cId="0" sldId="256"/>
             <ac:spMk id="5" creationId="{00000000-0000-0000-0000-000000000000}"/>
           </ac:spMkLst>
         </pc:spChg>
-        <pc:picChg chg="mod">
-          <ac:chgData name="mathangi.ashok25@gmail.com" userId="9696bdb82b516cd5" providerId="LiveId" clId="{34DDD5AE-C822-4FE7-A036-1A26010DC373}" dt="2025-04-21T11:05:04.270" v="4" actId="1076"/>
+      </pc:sldChg>
+      <pc:sldChg chg="addSp delSp modSp mod">
+        <pc:chgData name="mathangi.ashok25@gmail.com" userId="9696bdb82b516cd5" providerId="LiveId" clId="{32E0320E-F84D-4F2F-84D5-59E01E9CCC73}" dt="2025-04-20T17:28:01.831" v="118" actId="14100"/>
+        <pc:sldMkLst>
+          <pc:docMk/>
+          <pc:sldMk cId="0" sldId="257"/>
+        </pc:sldMkLst>
+        <pc:spChg chg="mod">
+          <ac:chgData name="mathangi.ashok25@gmail.com" userId="9696bdb82b516cd5" providerId="LiveId" clId="{32E0320E-F84D-4F2F-84D5-59E01E9CCC73}" dt="2025-04-20T17:28:01.831" v="118" actId="14100"/>
+          <ac:spMkLst>
+            <pc:docMk/>
+            <pc:sldMk cId="0" sldId="257"/>
+            <ac:spMk id="5" creationId="{00000000-0000-0000-0000-000000000000}"/>
+          </ac:spMkLst>
+        </pc:spChg>
+        <pc:spChg chg="mod">
+          <ac:chgData name="mathangi.ashok25@gmail.com" userId="9696bdb82b516cd5" providerId="LiveId" clId="{32E0320E-F84D-4F2F-84D5-59E01E9CCC73}" dt="2025-04-20T17:26:56.644" v="112" actId="14100"/>
+          <ac:spMkLst>
+            <pc:docMk/>
+            <pc:sldMk cId="0" sldId="257"/>
+            <ac:spMk id="7" creationId="{00000000-0000-0000-0000-000000000000}"/>
+          </ac:spMkLst>
+        </pc:spChg>
+        <pc:spChg chg="mod">
+          <ac:chgData name="mathangi.ashok25@gmail.com" userId="9696bdb82b516cd5" providerId="LiveId" clId="{32E0320E-F84D-4F2F-84D5-59E01E9CCC73}" dt="2025-04-20T17:27:19.274" v="115" actId="14100"/>
+          <ac:spMkLst>
+            <pc:docMk/>
+            <pc:sldMk cId="0" sldId="257"/>
+            <ac:spMk id="9" creationId="{00000000-0000-0000-0000-000000000000}"/>
+          </ac:spMkLst>
+        </pc:spChg>
+        <pc:spChg chg="mod">
+          <ac:chgData name="mathangi.ashok25@gmail.com" userId="9696bdb82b516cd5" providerId="LiveId" clId="{32E0320E-F84D-4F2F-84D5-59E01E9CCC73}" dt="2025-04-20T17:27:30.215" v="117" actId="14100"/>
+          <ac:spMkLst>
+            <pc:docMk/>
+            <pc:sldMk cId="0" sldId="257"/>
+            <ac:spMk id="11" creationId="{00000000-0000-0000-0000-000000000000}"/>
+          </ac:spMkLst>
+        </pc:spChg>
+        <pc:grpChg chg="mod">
+          <ac:chgData name="mathangi.ashok25@gmail.com" userId="9696bdb82b516cd5" providerId="LiveId" clId="{32E0320E-F84D-4F2F-84D5-59E01E9CCC73}" dt="2025-04-20T17:27:10.372" v="114" actId="1076"/>
+          <ac:grpSpMkLst>
+            <pc:docMk/>
+            <pc:sldMk cId="0" sldId="257"/>
+            <ac:grpSpMk id="4" creationId="{00000000-0000-0000-0000-000000000000}"/>
+          </ac:grpSpMkLst>
+        </pc:grpChg>
+        <pc:grpChg chg="mod">
+          <ac:chgData name="mathangi.ashok25@gmail.com" userId="9696bdb82b516cd5" providerId="LiveId" clId="{32E0320E-F84D-4F2F-84D5-59E01E9CCC73}" dt="2025-04-20T17:22:59.489" v="99" actId="1076"/>
+          <ac:grpSpMkLst>
+            <pc:docMk/>
+            <pc:sldMk cId="0" sldId="257"/>
+            <ac:grpSpMk id="12" creationId="{00000000-0000-0000-0000-000000000000}"/>
+          </ac:grpSpMkLst>
+        </pc:grpChg>
+        <pc:picChg chg="add mod">
+          <ac:chgData name="mathangi.ashok25@gmail.com" userId="9696bdb82b516cd5" providerId="LiveId" clId="{32E0320E-F84D-4F2F-84D5-59E01E9CCC73}" dt="2025-04-20T17:26:45.572" v="111" actId="14100"/>
           <ac:picMkLst>
             <pc:docMk/>
-            <pc:sldMk cId="0" sldId="256"/>
-            <ac:picMk id="8" creationId="{D574B2A9-843B-F32A-6F8B-6A0F1698DDE5}"/>
+            <pc:sldMk cId="0" sldId="257"/>
+            <ac:picMk id="19" creationId="{B5D2E92E-F78E-62F8-477B-7AF6EBE047C7}"/>
+          </ac:picMkLst>
+        </pc:picChg>
+      </pc:sldChg>
+      <pc:sldChg chg="addSp delSp modSp mod">
+        <pc:chgData name="mathangi.ashok25@gmail.com" userId="9696bdb82b516cd5" providerId="LiveId" clId="{32E0320E-F84D-4F2F-84D5-59E01E9CCC73}" dt="2025-04-20T17:38:04.882" v="156" actId="14100"/>
+        <pc:sldMkLst>
+          <pc:docMk/>
+          <pc:sldMk cId="0" sldId="258"/>
+        </pc:sldMkLst>
+        <pc:spChg chg="mod">
+          <ac:chgData name="mathangi.ashok25@gmail.com" userId="9696bdb82b516cd5" providerId="LiveId" clId="{32E0320E-F84D-4F2F-84D5-59E01E9CCC73}" dt="2025-04-20T17:32:09.036" v="119" actId="1076"/>
+          <ac:spMkLst>
+            <pc:docMk/>
+            <pc:sldMk cId="0" sldId="258"/>
+            <ac:spMk id="2" creationId="{00000000-0000-0000-0000-000000000000}"/>
+          </ac:spMkLst>
+        </pc:spChg>
+        <pc:spChg chg="mod">
+          <ac:chgData name="mathangi.ashok25@gmail.com" userId="9696bdb82b516cd5" providerId="LiveId" clId="{32E0320E-F84D-4F2F-84D5-59E01E9CCC73}" dt="2025-04-20T17:34:07.461" v="137" actId="1076"/>
+          <ac:spMkLst>
+            <pc:docMk/>
+            <pc:sldMk cId="0" sldId="258"/>
+            <ac:spMk id="4" creationId="{00000000-0000-0000-0000-000000000000}"/>
+          </ac:spMkLst>
+        </pc:spChg>
+        <pc:spChg chg="mod">
+          <ac:chgData name="mathangi.ashok25@gmail.com" userId="9696bdb82b516cd5" providerId="LiveId" clId="{32E0320E-F84D-4F2F-84D5-59E01E9CCC73}" dt="2025-04-20T17:37:30.507" v="150" actId="1076"/>
+          <ac:spMkLst>
+            <pc:docMk/>
+            <pc:sldMk cId="0" sldId="258"/>
+            <ac:spMk id="7" creationId="{00000000-0000-0000-0000-000000000000}"/>
+          </ac:spMkLst>
+        </pc:spChg>
+        <pc:spChg chg="mod">
+          <ac:chgData name="mathangi.ashok25@gmail.com" userId="9696bdb82b516cd5" providerId="LiveId" clId="{32E0320E-F84D-4F2F-84D5-59E01E9CCC73}" dt="2025-04-20T17:37:23.127" v="149" actId="1076"/>
+          <ac:spMkLst>
+            <pc:docMk/>
+            <pc:sldMk cId="0" sldId="258"/>
+            <ac:spMk id="9" creationId="{00000000-0000-0000-0000-000000000000}"/>
+          </ac:spMkLst>
+        </pc:spChg>
+        <pc:grpChg chg="add del mod">
+          <ac:chgData name="mathangi.ashok25@gmail.com" userId="9696bdb82b516cd5" providerId="LiveId" clId="{32E0320E-F84D-4F2F-84D5-59E01E9CCC73}" dt="2025-04-20T17:37:34.612" v="151" actId="1076"/>
+          <ac:grpSpMkLst>
+            <pc:docMk/>
+            <pc:sldMk cId="0" sldId="258"/>
+            <ac:grpSpMk id="3" creationId="{00000000-0000-0000-0000-000000000000}"/>
+          </ac:grpSpMkLst>
+        </pc:grpChg>
+        <pc:grpChg chg="mod">
+          <ac:chgData name="mathangi.ashok25@gmail.com" userId="9696bdb82b516cd5" providerId="LiveId" clId="{32E0320E-F84D-4F2F-84D5-59E01E9CCC73}" dt="2025-04-20T17:37:40.954" v="152" actId="1076"/>
+          <ac:grpSpMkLst>
+            <pc:docMk/>
+            <pc:sldMk cId="0" sldId="258"/>
+            <ac:grpSpMk id="10" creationId="{00000000-0000-0000-0000-000000000000}"/>
+          </ac:grpSpMkLst>
+        </pc:grpChg>
+        <pc:grpChg chg="mod">
+          <ac:chgData name="mathangi.ashok25@gmail.com" userId="9696bdb82b516cd5" providerId="LiveId" clId="{32E0320E-F84D-4F2F-84D5-59E01E9CCC73}" dt="2025-04-20T17:37:44.156" v="153" actId="1076"/>
+          <ac:grpSpMkLst>
+            <pc:docMk/>
+            <pc:sldMk cId="0" sldId="258"/>
+            <ac:grpSpMk id="14" creationId="{00000000-0000-0000-0000-000000000000}"/>
+          </ac:grpSpMkLst>
+        </pc:grpChg>
+        <pc:picChg chg="mod">
+          <ac:chgData name="mathangi.ashok25@gmail.com" userId="9696bdb82b516cd5" providerId="LiveId" clId="{32E0320E-F84D-4F2F-84D5-59E01E9CCC73}" dt="2025-04-20T17:34:08.162" v="138" actId="1076"/>
+          <ac:picMkLst>
+            <pc:docMk/>
+            <pc:sldMk cId="0" sldId="258"/>
+            <ac:picMk id="6" creationId="{00000000-0000-0000-0000-000000000000}"/>
+          </ac:picMkLst>
+        </pc:picChg>
+        <pc:picChg chg="mod">
+          <ac:chgData name="mathangi.ashok25@gmail.com" userId="9696bdb82b516cd5" providerId="LiveId" clId="{32E0320E-F84D-4F2F-84D5-59E01E9CCC73}" dt="2025-04-20T17:37:49.682" v="154" actId="1076"/>
+          <ac:picMkLst>
+            <pc:docMk/>
+            <pc:sldMk cId="0" sldId="258"/>
+            <ac:picMk id="8" creationId="{00000000-0000-0000-0000-000000000000}"/>
+          </ac:picMkLst>
+        </pc:picChg>
+        <pc:picChg chg="add mod">
+          <ac:chgData name="mathangi.ashok25@gmail.com" userId="9696bdb82b516cd5" providerId="LiveId" clId="{32E0320E-F84D-4F2F-84D5-59E01E9CCC73}" dt="2025-04-20T17:38:04.882" v="156" actId="14100"/>
+          <ac:picMkLst>
+            <pc:docMk/>
+            <pc:sldMk cId="0" sldId="258"/>
+            <ac:picMk id="19" creationId="{F2013269-2233-A3F1-49AC-69D0DC3453C0}"/>
+          </ac:picMkLst>
+        </pc:picChg>
+      </pc:sldChg>
+      <pc:sldChg chg="addSp delSp modSp mod">
+        <pc:chgData name="mathangi.ashok25@gmail.com" userId="9696bdb82b516cd5" providerId="LiveId" clId="{32E0320E-F84D-4F2F-84D5-59E01E9CCC73}" dt="2025-04-20T17:47:28.186" v="209" actId="14100"/>
+        <pc:sldMkLst>
+          <pc:docMk/>
+          <pc:sldMk cId="0" sldId="259"/>
+        </pc:sldMkLst>
+        <pc:spChg chg="mod">
+          <ac:chgData name="mathangi.ashok25@gmail.com" userId="9696bdb82b516cd5" providerId="LiveId" clId="{32E0320E-F84D-4F2F-84D5-59E01E9CCC73}" dt="2025-04-20T17:46:17.429" v="201" actId="1076"/>
+          <ac:spMkLst>
+            <pc:docMk/>
+            <pc:sldMk cId="0" sldId="259"/>
+            <ac:spMk id="21" creationId="{00000000-0000-0000-0000-000000000000}"/>
+          </ac:spMkLst>
+        </pc:spChg>
+        <pc:picChg chg="add mod">
+          <ac:chgData name="mathangi.ashok25@gmail.com" userId="9696bdb82b516cd5" providerId="LiveId" clId="{32E0320E-F84D-4F2F-84D5-59E01E9CCC73}" dt="2025-04-20T17:47:28.186" v="209" actId="14100"/>
+          <ac:picMkLst>
+            <pc:docMk/>
+            <pc:sldMk cId="0" sldId="259"/>
+            <ac:picMk id="25" creationId="{E749EF09-5B2F-5FA3-C8D3-24F24125DB1B}"/>
           </ac:picMkLst>
         </pc:picChg>
       </pc:sldChg>
       <pc:sldChg chg="modSp mod">
-        <pc:chgData name="mathangi.ashok25@gmail.com" userId="9696bdb82b516cd5" providerId="LiveId" clId="{34DDD5AE-C822-4FE7-A036-1A26010DC373}" dt="2025-04-22T17:54:08.104" v="26" actId="20577"/>
+        <pc:chgData name="mathangi.ashok25@gmail.com" userId="9696bdb82b516cd5" providerId="LiveId" clId="{32E0320E-F84D-4F2F-84D5-59E01E9CCC73}" dt="2025-04-20T17:08:11.288" v="7" actId="255"/>
         <pc:sldMkLst>
           <pc:docMk/>
-          <pc:sldMk cId="0" sldId="266"/>
+          <pc:sldMk cId="0" sldId="260"/>
         </pc:sldMkLst>
         <pc:spChg chg="mod">
-          <ac:chgData name="mathangi.ashok25@gmail.com" userId="9696bdb82b516cd5" providerId="LiveId" clId="{34DDD5AE-C822-4FE7-A036-1A26010DC373}" dt="2025-04-22T17:54:08.104" v="26" actId="20577"/>
+          <ac:chgData name="mathangi.ashok25@gmail.com" userId="9696bdb82b516cd5" providerId="LiveId" clId="{32E0320E-F84D-4F2F-84D5-59E01E9CCC73}" dt="2025-04-20T17:08:11.288" v="7" actId="255"/>
           <ac:spMkLst>
             <pc:docMk/>
-            <pc:sldMk cId="0" sldId="266"/>
+            <pc:sldMk cId="0" sldId="260"/>
+            <ac:spMk id="2" creationId="{00000000-0000-0000-0000-000000000000}"/>
+          </ac:spMkLst>
+        </pc:spChg>
+        <pc:spChg chg="mod">
+          <ac:chgData name="mathangi.ashok25@gmail.com" userId="9696bdb82b516cd5" providerId="LiveId" clId="{32E0320E-F84D-4F2F-84D5-59E01E9CCC73}" dt="2025-04-20T17:07:37.344" v="5" actId="255"/>
+          <ac:spMkLst>
+            <pc:docMk/>
+            <pc:sldMk cId="0" sldId="260"/>
+            <ac:spMk id="17" creationId="{00000000-0000-0000-0000-000000000000}"/>
+          </ac:spMkLst>
+        </pc:spChg>
+      </pc:sldChg>
+      <pc:sldChg chg="addSp delSp modSp mod">
+        <pc:chgData name="mathangi.ashok25@gmail.com" userId="9696bdb82b516cd5" providerId="LiveId" clId="{32E0320E-F84D-4F2F-84D5-59E01E9CCC73}" dt="2025-04-20T17:15:18.942" v="92" actId="20577"/>
+        <pc:sldMkLst>
+          <pc:docMk/>
+          <pc:sldMk cId="0" sldId="262"/>
+        </pc:sldMkLst>
+        <pc:spChg chg="mod">
+          <ac:chgData name="mathangi.ashok25@gmail.com" userId="9696bdb82b516cd5" providerId="LiveId" clId="{32E0320E-F84D-4F2F-84D5-59E01E9CCC73}" dt="2025-04-20T17:15:18.942" v="92" actId="20577"/>
+          <ac:spMkLst>
+            <pc:docMk/>
+            <pc:sldMk cId="0" sldId="262"/>
+            <ac:spMk id="15" creationId="{00000000-0000-0000-0000-000000000000}"/>
+          </ac:spMkLst>
+        </pc:spChg>
+        <pc:picChg chg="add mod">
+          <ac:chgData name="mathangi.ashok25@gmail.com" userId="9696bdb82b516cd5" providerId="LiveId" clId="{32E0320E-F84D-4F2F-84D5-59E01E9CCC73}" dt="2025-04-20T17:14:38.153" v="89" actId="1076"/>
+          <ac:picMkLst>
+            <pc:docMk/>
+            <pc:sldMk cId="0" sldId="262"/>
+            <ac:picMk id="17" creationId="{A41C5B01-CAB3-577B-BFF3-A710A380C4D3}"/>
+          </ac:picMkLst>
+        </pc:picChg>
+      </pc:sldChg>
+      <pc:sldChg chg="modSp mod">
+        <pc:chgData name="mathangi.ashok25@gmail.com" userId="9696bdb82b516cd5" providerId="LiveId" clId="{32E0320E-F84D-4F2F-84D5-59E01E9CCC73}" dt="2025-04-20T17:53:03.085" v="317" actId="255"/>
+        <pc:sldMkLst>
+          <pc:docMk/>
+          <pc:sldMk cId="0" sldId="264"/>
+        </pc:sldMkLst>
+        <pc:spChg chg="mod">
+          <ac:chgData name="mathangi.ashok25@gmail.com" userId="9696bdb82b516cd5" providerId="LiveId" clId="{32E0320E-F84D-4F2F-84D5-59E01E9CCC73}" dt="2025-04-20T17:52:46.117" v="316" actId="255"/>
+          <ac:spMkLst>
+            <pc:docMk/>
+            <pc:sldMk cId="0" sldId="264"/>
             <ac:spMk id="4" creationId="{00000000-0000-0000-0000-000000000000}"/>
           </ac:spMkLst>
         </pc:spChg>
+        <pc:spChg chg="mod">
+          <ac:chgData name="mathangi.ashok25@gmail.com" userId="9696bdb82b516cd5" providerId="LiveId" clId="{32E0320E-F84D-4F2F-84D5-59E01E9CCC73}" dt="2025-04-20T17:52:34.954" v="315" actId="255"/>
+          <ac:spMkLst>
+            <pc:docMk/>
+            <pc:sldMk cId="0" sldId="264"/>
+            <ac:spMk id="6" creationId="{00000000-0000-0000-0000-000000000000}"/>
+          </ac:spMkLst>
+        </pc:spChg>
+        <pc:spChg chg="mod">
+          <ac:chgData name="mathangi.ashok25@gmail.com" userId="9696bdb82b516cd5" providerId="LiveId" clId="{32E0320E-F84D-4F2F-84D5-59E01E9CCC73}" dt="2025-04-20T17:53:03.085" v="317" actId="255"/>
+          <ac:spMkLst>
+            <pc:docMk/>
+            <pc:sldMk cId="0" sldId="264"/>
+            <ac:spMk id="8" creationId="{00000000-0000-0000-0000-000000000000}"/>
+          </ac:spMkLst>
+        </pc:spChg>
+      </pc:sldChg>
+      <pc:sldChg chg="addSp modSp mod">
+        <pc:chgData name="mathangi.ashok25@gmail.com" userId="9696bdb82b516cd5" providerId="LiveId" clId="{32E0320E-F84D-4F2F-84D5-59E01E9CCC73}" dt="2025-04-20T18:02:50.094" v="356" actId="20577"/>
+        <pc:sldMkLst>
+          <pc:docMk/>
+          <pc:sldMk cId="0" sldId="265"/>
+        </pc:sldMkLst>
+        <pc:spChg chg="mod">
+          <ac:chgData name="mathangi.ashok25@gmail.com" userId="9696bdb82b516cd5" providerId="LiveId" clId="{32E0320E-F84D-4F2F-84D5-59E01E9CCC73}" dt="2025-04-20T18:02:50.094" v="356" actId="20577"/>
+          <ac:spMkLst>
+            <pc:docMk/>
+            <pc:sldMk cId="0" sldId="265"/>
+            <ac:spMk id="3" creationId="{00000000-0000-0000-0000-000000000000}"/>
+          </ac:spMkLst>
+        </pc:spChg>
+        <pc:spChg chg="mod">
+          <ac:chgData name="mathangi.ashok25@gmail.com" userId="9696bdb82b516cd5" providerId="LiveId" clId="{32E0320E-F84D-4F2F-84D5-59E01E9CCC73}" dt="2025-04-20T18:02:16.456" v="353" actId="207"/>
+          <ac:spMkLst>
+            <pc:docMk/>
+            <pc:sldMk cId="0" sldId="265"/>
+            <ac:spMk id="17" creationId="{00000000-0000-0000-0000-000000000000}"/>
+          </ac:spMkLst>
+        </pc:spChg>
+        <pc:picChg chg="add mod ord">
+          <ac:chgData name="mathangi.ashok25@gmail.com" userId="9696bdb82b516cd5" providerId="LiveId" clId="{32E0320E-F84D-4F2F-84D5-59E01E9CCC73}" dt="2025-04-20T17:59:43.618" v="347" actId="14100"/>
+          <ac:picMkLst>
+            <pc:docMk/>
+            <pc:sldMk cId="0" sldId="265"/>
+            <ac:picMk id="4" creationId="{2B131CBD-F09A-2946-8178-061CC03824D2}"/>
+          </ac:picMkLst>
+        </pc:picChg>
+      </pc:sldChg>
+      <pc:sldChg chg="addSp delSp modSp new add del mod">
+        <pc:chgData name="mathangi.ashok25@gmail.com" userId="9696bdb82b516cd5" providerId="LiveId" clId="{32E0320E-F84D-4F2F-84D5-59E01E9CCC73}" dt="2025-04-20T17:24:17.621" v="105" actId="2696"/>
+        <pc:sldMkLst>
+          <pc:docMk/>
+          <pc:sldMk cId="1550100419" sldId="267"/>
+        </pc:sldMkLst>
       </pc:sldChg>
     </pc:docChg>
   </pc:docChgLst>
@@ -301,7 +566,7 @@
           <a:p>
             <a:fld id="{5569A321-05E8-4F8D-8780-CB7DBC7BD045}" type="datetimeFigureOut">
               <a:rPr lang="en-IN" smtClean="0"/>
-              <a:t>22-04-2025</a:t>
+              <a:t>23-04-2025</a:t>
             </a:fld>
             <a:endParaRPr lang="en-IN"/>
           </a:p>
@@ -802,7 +1067,7 @@
           <a:p>
             <a:fld id="{1D8BD707-D9CF-40AE-B4C6-C98DA3205C09}" type="datetimeFigureOut">
               <a:rPr lang="en-US" smtClean="0"/>
-              <a:t>4/22/2025</a:t>
+              <a:t>4/23/2025</a:t>
             </a:fld>
             <a:endParaRPr lang="en-US"/>
           </a:p>
@@ -1002,7 +1267,7 @@
           <a:p>
             <a:fld id="{1D8BD707-D9CF-40AE-B4C6-C98DA3205C09}" type="datetimeFigureOut">
               <a:rPr lang="en-US" smtClean="0"/>
-              <a:t>4/22/2025</a:t>
+              <a:t>4/23/2025</a:t>
             </a:fld>
             <a:endParaRPr lang="en-US"/>
           </a:p>
@@ -1212,7 +1477,7 @@
           <a:p>
             <a:fld id="{1D8BD707-D9CF-40AE-B4C6-C98DA3205C09}" type="datetimeFigureOut">
               <a:rPr lang="en-US" smtClean="0"/>
-              <a:t>4/22/2025</a:t>
+              <a:t>4/23/2025</a:t>
             </a:fld>
             <a:endParaRPr lang="en-US"/>
           </a:p>
@@ -1461,7 +1726,7 @@
           <a:p>
             <a:fld id="{1D8BD707-D9CF-40AE-B4C6-C98DA3205C09}" type="datetimeFigureOut">
               <a:rPr lang="en-US"/>
-              <a:t>4/22/2025</a:t>
+              <a:t>4/23/2025</a:t>
             </a:fld>
             <a:endParaRPr lang="en-US"/>
           </a:p>
@@ -1639,7 +1904,7 @@
           <a:p>
             <a:fld id="{1D8BD707-D9CF-40AE-B4C6-C98DA3205C09}" type="datetimeFigureOut">
               <a:rPr lang="en-US" smtClean="0"/>
-              <a:t>4/22/2025</a:t>
+              <a:t>4/23/2025</a:t>
             </a:fld>
             <a:endParaRPr lang="en-US"/>
           </a:p>
@@ -1915,7 +2180,7 @@
           <a:p>
             <a:fld id="{1D8BD707-D9CF-40AE-B4C6-C98DA3205C09}" type="datetimeFigureOut">
               <a:rPr lang="en-US" smtClean="0"/>
-              <a:t>4/22/2025</a:t>
+              <a:t>4/23/2025</a:t>
             </a:fld>
             <a:endParaRPr lang="en-US"/>
           </a:p>
@@ -2183,7 +2448,7 @@
           <a:p>
             <a:fld id="{1D8BD707-D9CF-40AE-B4C6-C98DA3205C09}" type="datetimeFigureOut">
               <a:rPr lang="en-US" smtClean="0"/>
-              <a:t>4/22/2025</a:t>
+              <a:t>4/23/2025</a:t>
             </a:fld>
             <a:endParaRPr lang="en-US"/>
           </a:p>
@@ -2598,7 +2863,7 @@
           <a:p>
             <a:fld id="{1D8BD707-D9CF-40AE-B4C6-C98DA3205C09}" type="datetimeFigureOut">
               <a:rPr lang="en-US" smtClean="0"/>
-              <a:t>4/22/2025</a:t>
+              <a:t>4/23/2025</a:t>
             </a:fld>
             <a:endParaRPr lang="en-US"/>
           </a:p>
@@ -2740,7 +3005,7 @@
           <a:p>
             <a:fld id="{1D8BD707-D9CF-40AE-B4C6-C98DA3205C09}" type="datetimeFigureOut">
               <a:rPr lang="en-US" smtClean="0"/>
-              <a:t>4/22/2025</a:t>
+              <a:t>4/23/2025</a:t>
             </a:fld>
             <a:endParaRPr lang="en-US"/>
           </a:p>
@@ -2853,7 +3118,7 @@
           <a:p>
             <a:fld id="{1D8BD707-D9CF-40AE-B4C6-C98DA3205C09}" type="datetimeFigureOut">
               <a:rPr lang="en-US" smtClean="0"/>
-              <a:t>4/22/2025</a:t>
+              <a:t>4/23/2025</a:t>
             </a:fld>
             <a:endParaRPr lang="en-US"/>
           </a:p>
@@ -3166,7 +3431,7 @@
           <a:p>
             <a:fld id="{1D8BD707-D9CF-40AE-B4C6-C98DA3205C09}" type="datetimeFigureOut">
               <a:rPr lang="en-US" smtClean="0"/>
-              <a:t>4/22/2025</a:t>
+              <a:t>4/23/2025</a:t>
             </a:fld>
             <a:endParaRPr lang="en-US"/>
           </a:p>
@@ -3455,7 +3720,7 @@
           <a:p>
             <a:fld id="{1D8BD707-D9CF-40AE-B4C6-C98DA3205C09}" type="datetimeFigureOut">
               <a:rPr lang="en-US" smtClean="0"/>
-              <a:t>4/22/2025</a:t>
+              <a:t>4/23/2025</a:t>
             </a:fld>
             <a:endParaRPr lang="en-US"/>
           </a:p>
@@ -3698,7 +3963,7 @@
           <a:p>
             <a:fld id="{1D8BD707-D9CF-40AE-B4C6-C98DA3205C09}" type="datetimeFigureOut">
               <a:rPr lang="en-US" smtClean="0"/>
-              <a:t>4/22/2025</a:t>
+              <a:t>4/23/2025</a:t>
             </a:fld>
             <a:endParaRPr lang="en-US"/>
           </a:p>
@@ -4128,8 +4393,8 @@
         </p:nvSpPr>
         <p:spPr>
           <a:xfrm>
-            <a:off x="304800" y="450455"/>
-            <a:ext cx="6400800" cy="1766766"/>
+            <a:off x="4953000" y="504466"/>
+            <a:ext cx="6019800" cy="1766766"/>
           </a:xfrm>
           <a:prstGeom prst="rect">
             <a:avLst/>
@@ -4618,35 +4883,28 @@
               </a:lnSpc>
             </a:pPr>
             <a:r>
-              <a:rPr sz="1800" b="1">
+              <a:rPr sz="1800" b="1" dirty="0">
                 <a:latin typeface="Tahoma"/>
                 <a:cs typeface="Tahoma"/>
               </a:rPr>
               <a:t>by</a:t>
             </a:r>
             <a:r>
-              <a:rPr sz="1800" b="1" spc="-30">
+              <a:rPr sz="1800" b="1" spc="-30" dirty="0">
                 <a:latin typeface="Tahoma"/>
                 <a:cs typeface="Tahoma"/>
               </a:rPr>
               <a:t> </a:t>
             </a:r>
             <a:r>
-              <a:rPr sz="1800" b="1">
+              <a:rPr sz="1800" b="1" dirty="0">
                 <a:latin typeface="Tahoma"/>
                 <a:cs typeface="Tahoma"/>
               </a:rPr>
               <a:t>Chandini</a:t>
             </a:r>
             <a:r>
-              <a:rPr lang="en-US" sz="1800" b="1">
-                <a:latin typeface="Tahoma"/>
-                <a:cs typeface="Tahoma"/>
-              </a:rPr>
-              <a:t> Ashok</a:t>
-            </a:r>
-            <a:r>
-              <a:rPr sz="1800" b="1" spc="-25">
+              <a:rPr sz="1800" b="1" spc="-25" dirty="0">
                 <a:latin typeface="Tahoma"/>
                 <a:cs typeface="Tahoma"/>
               </a:rPr>
@@ -4790,7 +5048,7 @@
         </p:blipFill>
         <p:spPr>
           <a:xfrm>
-            <a:off x="5745827" y="219090"/>
+            <a:off x="304800" y="219090"/>
             <a:ext cx="4569748" cy="2897322"/>
           </a:xfrm>
           <a:prstGeom prst="rect">
@@ -6616,8 +6874,8 @@
         </p:nvSpPr>
         <p:spPr>
           <a:xfrm>
-            <a:off x="6629400" y="6837290"/>
-            <a:ext cx="4060825" cy="570028"/>
+            <a:off x="7391400" y="6837290"/>
+            <a:ext cx="3298825" cy="570028"/>
           </a:xfrm>
           <a:prstGeom prst="rect">
             <a:avLst/>
@@ -6638,11 +6896,11 @@
               </a:spcBef>
             </a:pPr>
             <a:r>
-              <a:rPr lang="en-US" sz="3600" b="1" i="1" spc="-180" dirty="0">
+              <a:rPr sz="3600" b="1" i="1" spc="-180" dirty="0">
                 <a:latin typeface="Californian FB" panose="0207040306080B030204" pitchFamily="18" charset="0"/>
                 <a:cs typeface="Georgia"/>
               </a:rPr>
-              <a:t>CHANDINI ASHOK</a:t>
+              <a:t>CHANDINI</a:t>
             </a:r>
             <a:r>
               <a:rPr sz="1800" b="1" i="1" spc="-40" dirty="0">
